--- a/Sesion3_Presentacion_(ok).pptx
+++ b/Sesion3_Presentacion_(ok).pptx
@@ -6,7 +6,7 @@
     <p:sldMasterId id="2147483650" r:id="rId2"/>
   </p:sldMasterIdLst>
   <p:notesMasterIdLst>
-    <p:notesMasterId r:id="rId15"/>
+    <p:notesMasterId r:id="rId16"/>
   </p:notesMasterIdLst>
   <p:sldIdLst>
     <p:sldId id="256" r:id="rId3"/>
@@ -14,13 +14,14 @@
     <p:sldId id="268" r:id="rId5"/>
     <p:sldId id="258" r:id="rId6"/>
     <p:sldId id="266" r:id="rId7"/>
-    <p:sldId id="259" r:id="rId8"/>
-    <p:sldId id="260" r:id="rId9"/>
-    <p:sldId id="261" r:id="rId10"/>
-    <p:sldId id="262" r:id="rId11"/>
-    <p:sldId id="263" r:id="rId12"/>
-    <p:sldId id="267" r:id="rId13"/>
-    <p:sldId id="265" r:id="rId14"/>
+    <p:sldId id="1599" r:id="rId8"/>
+    <p:sldId id="259" r:id="rId9"/>
+    <p:sldId id="260" r:id="rId10"/>
+    <p:sldId id="261" r:id="rId11"/>
+    <p:sldId id="262" r:id="rId12"/>
+    <p:sldId id="263" r:id="rId13"/>
+    <p:sldId id="267" r:id="rId14"/>
+    <p:sldId id="265" r:id="rId15"/>
   </p:sldIdLst>
   <p:sldSz cx="9144000" cy="5143500" type="screen16x9"/>
   <p:notesSz cx="5143500" cy="9144000"/>
@@ -127,7 +128,7 @@
 <file path=ppt/revisionInfo.xml><?xml version="1.0" encoding="utf-8"?>
 <p1510:revInfo xmlns:a="http://schemas.openxmlformats.org/drawingml/2006/main" xmlns:r="http://schemas.openxmlformats.org/officeDocument/2006/relationships" xmlns:p1510="http://schemas.microsoft.com/office/powerpoint/2015/10/main">
   <p1510:revLst>
-    <p1510:client id="{4186B2B9-DB2B-4758-8C4F-AC5667730A0E}" v="8" dt="2026-04-28T16:38:13.034"/>
+    <p1510:client id="{4186B2B9-DB2B-4758-8C4F-AC5667730A0E}" v="9" dt="2026-04-28T16:48:36.516"/>
   </p1510:revLst>
 </p1510:revInfo>
 </file>
@@ -137,7 +138,7 @@
   <pc:docChgLst>
     <pc:chgData name="Diana Angélica Cruz Ortega" userId="b65eefa029f56b0b" providerId="LiveId" clId="{770039B8-D00B-4691-AC64-6975C7009C28}"/>
     <pc:docChg chg="undo custSel addSld delSld modSld sldOrd">
-      <pc:chgData name="Diana Angélica Cruz Ortega" userId="b65eefa029f56b0b" providerId="LiveId" clId="{770039B8-D00B-4691-AC64-6975C7009C28}" dt="2026-04-28T16:38:29.080" v="102" actId="1076"/>
+      <pc:chgData name="Diana Angélica Cruz Ortega" userId="b65eefa029f56b0b" providerId="LiveId" clId="{770039B8-D00B-4691-AC64-6975C7009C28}" dt="2026-04-28T16:48:36.506" v="103"/>
       <pc:docMkLst>
         <pc:docMk/>
       </pc:docMkLst>
@@ -393,6 +394,13 @@
           </ac:graphicFrameMkLst>
         </pc:graphicFrameChg>
       </pc:sldChg>
+      <pc:sldChg chg="add">
+        <pc:chgData name="Diana Angélica Cruz Ortega" userId="b65eefa029f56b0b" providerId="LiveId" clId="{770039B8-D00B-4691-AC64-6975C7009C28}" dt="2026-04-28T16:48:36.506" v="103"/>
+        <pc:sldMkLst>
+          <pc:docMk/>
+          <pc:sldMk cId="4242831982" sldId="1599"/>
+        </pc:sldMkLst>
+      </pc:sldChg>
     </pc:docChg>
   </pc:docChgLst>
 </pc:chgInfo>
@@ -688,7 +696,7 @@
           <a:p>
             <a:fld id="{F7021451-1387-4CA6-816F-3879F97B5CBC}" type="slidenum">
               <a:rPr lang="en-US"/>
-              <a:t>12</a:t>
+              <a:t>13</a:t>
             </a:fld>
             <a:endParaRPr lang="en-US"/>
           </a:p>
@@ -1084,7 +1092,7 @@
           <a:p>
             <a:fld id="{F7021451-1387-4CA6-816F-3879F97B5CBC}" type="slidenum">
               <a:rPr lang="en-US"/>
-              <a:t>6</a:t>
+              <a:t>7</a:t>
             </a:fld>
             <a:endParaRPr lang="en-US"/>
           </a:p>
@@ -1176,7 +1184,7 @@
           <a:p>
             <a:fld id="{F7021451-1387-4CA6-816F-3879F97B5CBC}" type="slidenum">
               <a:rPr lang="en-US"/>
-              <a:t>7</a:t>
+              <a:t>8</a:t>
             </a:fld>
             <a:endParaRPr lang="en-US"/>
           </a:p>
@@ -1265,7 +1273,7 @@
           <a:p>
             <a:fld id="{F7021451-1387-4CA6-816F-3879F97B5CBC}" type="slidenum">
               <a:rPr lang="en-US"/>
-              <a:t>8</a:t>
+              <a:t>9</a:t>
             </a:fld>
             <a:endParaRPr lang="en-US"/>
           </a:p>
@@ -1357,7 +1365,7 @@
           <a:p>
             <a:fld id="{F7021451-1387-4CA6-816F-3879F97B5CBC}" type="slidenum">
               <a:rPr lang="en-US"/>
-              <a:t>9</a:t>
+              <a:t>10</a:t>
             </a:fld>
             <a:endParaRPr lang="en-US"/>
           </a:p>
@@ -1449,7 +1457,7 @@
           <a:p>
             <a:fld id="{F7021451-1387-4CA6-816F-3879F97B5CBC}" type="slidenum">
               <a:rPr lang="en-US"/>
-              <a:t>10</a:t>
+              <a:t>11</a:t>
             </a:fld>
             <a:endParaRPr lang="en-US"/>
           </a:p>
@@ -1554,6 +1562,36 @@
     <p:extLst>
       <p:ext uri="{BB962C8B-B14F-4D97-AF65-F5344CB8AC3E}">
         <p14:creationId xmlns:p14="http://schemas.microsoft.com/office/powerpoint/2010/main" val="1926438971"/>
+      </p:ext>
+    </p:extLst>
+  </p:cSld>
+  <p:clrMapOvr>
+    <a:masterClrMapping/>
+  </p:clrMapOvr>
+</p:sldLayout>
+</file>
+
+<file path=ppt/slideLayouts/slideLayout4.xml><?xml version="1.0" encoding="utf-8"?>
+<p:sldLayout xmlns:a="http://schemas.openxmlformats.org/drawingml/2006/main" xmlns:r="http://schemas.openxmlformats.org/officeDocument/2006/relationships" xmlns:p="http://schemas.openxmlformats.org/presentationml/2006/main" userDrawn="1">
+  <p:cSld name="Diseño personalizado">
+    <p:spTree>
+      <p:nvGrpSpPr>
+        <p:cNvPr id="1" name=""/>
+        <p:cNvGrpSpPr/>
+        <p:nvPr/>
+      </p:nvGrpSpPr>
+      <p:grpSpPr>
+        <a:xfrm>
+          <a:off x="0" y="0"/>
+          <a:ext cx="0" cy="0"/>
+          <a:chOff x="0" y="0"/>
+          <a:chExt cx="0" cy="0"/>
+        </a:xfrm>
+      </p:grpSpPr>
+    </p:spTree>
+    <p:extLst>
+      <p:ext uri="{BB962C8B-B14F-4D97-AF65-F5344CB8AC3E}">
+        <p14:creationId xmlns:p14="http://schemas.microsoft.com/office/powerpoint/2010/main" val="1961496140"/>
       </p:ext>
     </p:extLst>
   </p:cSld>
@@ -1878,6 +1916,7 @@
   <p:sldLayoutIdLst>
     <p:sldLayoutId id="2147483651" r:id="rId1"/>
     <p:sldLayoutId id="2147483652" r:id="rId2"/>
+    <p:sldLayoutId id="2147483653" r:id="rId3"/>
   </p:sldLayoutIdLst>
   <p:hf sldNum="0" hdr="0" ftr="0" dt="0"/>
   <p:txStyles>
@@ -2598,6 +2637,468 @@
 
 <file path=ppt/slides/slide10.xml><?xml version="1.0" encoding="utf-8"?>
 <p:sld xmlns:a="http://schemas.openxmlformats.org/drawingml/2006/main" xmlns:r="http://schemas.openxmlformats.org/officeDocument/2006/relationships" xmlns:p="http://schemas.openxmlformats.org/presentationml/2006/main">
+  <p:cSld name="Slide 7">
+    <p:bg>
+      <p:bgPr>
+        <a:solidFill>
+          <a:srgbClr val="1C3557"/>
+        </a:solidFill>
+        <a:effectLst/>
+      </p:bgPr>
+    </p:bg>
+    <p:spTree>
+      <p:nvGrpSpPr>
+        <p:cNvPr id="1" name=""/>
+        <p:cNvGrpSpPr/>
+        <p:nvPr/>
+      </p:nvGrpSpPr>
+      <p:grpSpPr>
+        <a:xfrm>
+          <a:off x="0" y="0"/>
+          <a:ext cx="0" cy="0"/>
+          <a:chOff x="0" y="0"/>
+          <a:chExt cx="0" cy="0"/>
+        </a:xfrm>
+      </p:grpSpPr>
+      <p:sp>
+        <p:nvSpPr>
+          <p:cNvPr id="2" name="Shape 0"/>
+          <p:cNvSpPr/>
+          <p:nvPr/>
+        </p:nvSpPr>
+        <p:spPr>
+          <a:xfrm>
+            <a:off x="0" y="0"/>
+            <a:ext cx="9144000" cy="1417320"/>
+          </a:xfrm>
+          <a:prstGeom prst="rect">
+            <a:avLst/>
+          </a:prstGeom>
+          <a:solidFill>
+            <a:srgbClr val="0E7490">
+              <a:alpha val="20000"/>
+            </a:srgbClr>
+          </a:solidFill>
+          <a:ln w="12700">
+            <a:solidFill>
+              <a:srgbClr val="0E7490">
+                <a:alpha val="0"/>
+              </a:srgbClr>
+            </a:solidFill>
+            <a:prstDash val="solid"/>
+          </a:ln>
+        </p:spPr>
+        <p:txBody>
+          <a:bodyPr/>
+          <a:lstStyle/>
+          <a:p>
+            <a:endParaRPr lang="es-CO"/>
+          </a:p>
+        </p:txBody>
+      </p:sp>
+      <p:sp>
+        <p:nvSpPr>
+          <p:cNvPr id="3" name="Text 1"/>
+          <p:cNvSpPr/>
+          <p:nvPr/>
+        </p:nvSpPr>
+        <p:spPr>
+          <a:xfrm>
+            <a:off x="457200" y="201168"/>
+            <a:ext cx="8229600" cy="320040"/>
+          </a:xfrm>
+          <a:prstGeom prst="rect">
+            <a:avLst/>
+          </a:prstGeom>
+          <a:noFill/>
+          <a:ln/>
+        </p:spPr>
+        <p:txBody>
+          <a:bodyPr wrap="square" rtlCol="0" anchor="ctr"/>
+          <a:lstStyle/>
+          <a:p>
+            <a:pPr marL="0" indent="0">
+              <a:buNone/>
+            </a:pPr>
+            <a:r>
+              <a:rPr lang="en-US" sz="900" b="1" kern="0" spc="200" dirty="0">
+                <a:solidFill>
+                  <a:srgbClr val="9DD9E8"/>
+                </a:solidFill>
+                <a:latin typeface="Calibri" pitchFamily="34" charset="0"/>
+                <a:ea typeface="Calibri" pitchFamily="34" charset="-122"/>
+                <a:cs typeface="Calibri" pitchFamily="34" charset="-120"/>
+              </a:rPr>
+              <a:t>BLOQUE 2 — GOBIERNO DE TI</a:t>
+            </a:r>
+            <a:endParaRPr lang="en-US" sz="900" dirty="0"/>
+          </a:p>
+        </p:txBody>
+      </p:sp>
+      <p:sp>
+        <p:nvSpPr>
+          <p:cNvPr id="4" name="Text 2"/>
+          <p:cNvSpPr/>
+          <p:nvPr/>
+        </p:nvSpPr>
+        <p:spPr>
+          <a:xfrm>
+            <a:off x="457200" y="530352"/>
+            <a:ext cx="8229600" cy="841248"/>
+          </a:xfrm>
+          <a:prstGeom prst="rect">
+            <a:avLst/>
+          </a:prstGeom>
+          <a:noFill/>
+          <a:ln/>
+        </p:spPr>
+        <p:txBody>
+          <a:bodyPr wrap="square" rtlCol="0" anchor="ctr"/>
+          <a:lstStyle/>
+          <a:p>
+            <a:pPr marL="0" indent="0">
+              <a:lnSpc>
+                <a:spcPct val="120000"/>
+              </a:lnSpc>
+              <a:buNone/>
+            </a:pPr>
+            <a:r>
+              <a:rPr lang="en-US" sz="2400" b="1" dirty="0">
+                <a:solidFill>
+                  <a:srgbClr val="FFFFFF"/>
+                </a:solidFill>
+                <a:latin typeface="Georgia" pitchFamily="34" charset="0"/>
+                <a:ea typeface="Georgia" pitchFamily="34" charset="-122"/>
+                <a:cs typeface="Georgia" pitchFamily="34" charset="-120"/>
+              </a:rPr>
+              <a:t>¿Qué datos le damos a la IA — y quién decide eso?</a:t>
+            </a:r>
+            <a:endParaRPr lang="en-US" sz="2400" dirty="0"/>
+          </a:p>
+        </p:txBody>
+      </p:sp>
+      <p:sp>
+        <p:nvSpPr>
+          <p:cNvPr id="5" name="Shape 3"/>
+          <p:cNvSpPr/>
+          <p:nvPr/>
+        </p:nvSpPr>
+        <p:spPr>
+          <a:xfrm>
+            <a:off x="365760" y="1572768"/>
+            <a:ext cx="8412480" cy="621792"/>
+          </a:xfrm>
+          <a:prstGeom prst="rect">
+            <a:avLst/>
+          </a:prstGeom>
+          <a:solidFill>
+            <a:srgbClr val="FFFFFF">
+              <a:alpha val="8000"/>
+            </a:srgbClr>
+          </a:solidFill>
+          <a:ln w="12700">
+            <a:solidFill>
+              <a:srgbClr val="FFFFFF">
+                <a:alpha val="20000"/>
+              </a:srgbClr>
+            </a:solidFill>
+            <a:prstDash val="solid"/>
+          </a:ln>
+        </p:spPr>
+        <p:txBody>
+          <a:bodyPr/>
+          <a:lstStyle/>
+          <a:p>
+            <a:endParaRPr lang="es-CO"/>
+          </a:p>
+        </p:txBody>
+      </p:sp>
+      <p:sp>
+        <p:nvSpPr>
+          <p:cNvPr id="6" name="Text 4"/>
+          <p:cNvSpPr/>
+          <p:nvPr/>
+        </p:nvSpPr>
+        <p:spPr>
+          <a:xfrm>
+            <a:off x="502920" y="1600200"/>
+            <a:ext cx="8229600" cy="566928"/>
+          </a:xfrm>
+          <a:prstGeom prst="rect">
+            <a:avLst/>
+          </a:prstGeom>
+          <a:noFill/>
+          <a:ln/>
+        </p:spPr>
+        <p:txBody>
+          <a:bodyPr wrap="square" rtlCol="0" anchor="ctr"/>
+          <a:lstStyle/>
+          <a:p>
+            <a:pPr marL="0" indent="0">
+              <a:lnSpc>
+                <a:spcPct val="130000"/>
+              </a:lnSpc>
+              <a:buNone/>
+            </a:pPr>
+            <a:r>
+              <a:rPr lang="en-US" sz="1200" dirty="0">
+                <a:solidFill>
+                  <a:srgbClr val="DDEEFF"/>
+                </a:solidFill>
+                <a:latin typeface="Calibri" pitchFamily="34" charset="0"/>
+                <a:ea typeface="Calibri" pitchFamily="34" charset="-122"/>
+                <a:cs typeface="Calibri" pitchFamily="34" charset="-120"/>
+              </a:rPr>
+              <a:t>→  Si alguien carga datos de personal o contractuales en Copilot — ¿dónde quedan? ¿Quién lo controla?</a:t>
+            </a:r>
+            <a:endParaRPr lang="en-US" sz="1200" dirty="0"/>
+          </a:p>
+        </p:txBody>
+      </p:sp>
+      <p:sp>
+        <p:nvSpPr>
+          <p:cNvPr id="7" name="Shape 5"/>
+          <p:cNvSpPr/>
+          <p:nvPr/>
+        </p:nvSpPr>
+        <p:spPr>
+          <a:xfrm>
+            <a:off x="365760" y="2350008"/>
+            <a:ext cx="8412480" cy="621792"/>
+          </a:xfrm>
+          <a:prstGeom prst="rect">
+            <a:avLst/>
+          </a:prstGeom>
+          <a:solidFill>
+            <a:srgbClr val="FFFFFF">
+              <a:alpha val="8000"/>
+            </a:srgbClr>
+          </a:solidFill>
+          <a:ln w="12700">
+            <a:solidFill>
+              <a:srgbClr val="FFFFFF">
+                <a:alpha val="20000"/>
+              </a:srgbClr>
+            </a:solidFill>
+            <a:prstDash val="solid"/>
+          </a:ln>
+        </p:spPr>
+        <p:txBody>
+          <a:bodyPr/>
+          <a:lstStyle/>
+          <a:p>
+            <a:endParaRPr lang="es-CO"/>
+          </a:p>
+        </p:txBody>
+      </p:sp>
+      <p:sp>
+        <p:nvSpPr>
+          <p:cNvPr id="8" name="Text 6"/>
+          <p:cNvSpPr/>
+          <p:nvPr/>
+        </p:nvSpPr>
+        <p:spPr>
+          <a:xfrm>
+            <a:off x="502920" y="2377440"/>
+            <a:ext cx="8229600" cy="566928"/>
+          </a:xfrm>
+          <a:prstGeom prst="rect">
+            <a:avLst/>
+          </a:prstGeom>
+          <a:noFill/>
+          <a:ln/>
+        </p:spPr>
+        <p:txBody>
+          <a:bodyPr wrap="square" rtlCol="0" anchor="ctr"/>
+          <a:lstStyle/>
+          <a:p>
+            <a:pPr marL="0" indent="0">
+              <a:lnSpc>
+                <a:spcPct val="130000"/>
+              </a:lnSpc>
+              <a:buNone/>
+            </a:pPr>
+            <a:r>
+              <a:rPr lang="en-US" sz="1200" dirty="0">
+                <a:solidFill>
+                  <a:srgbClr val="DDEEFF"/>
+                </a:solidFill>
+                <a:latin typeface="Calibri" pitchFamily="34" charset="0"/>
+                <a:ea typeface="Calibri" pitchFamily="34" charset="-122"/>
+                <a:cs typeface="Calibri" pitchFamily="34" charset="-120"/>
+              </a:rPr>
+              <a:t>→  ¿Existe una clasificación de qué información puede usarse con IA externa? ¿Quién debería definirla?</a:t>
+            </a:r>
+            <a:endParaRPr lang="en-US" sz="1200" dirty="0"/>
+          </a:p>
+        </p:txBody>
+      </p:sp>
+      <p:sp>
+        <p:nvSpPr>
+          <p:cNvPr id="9" name="Shape 7"/>
+          <p:cNvSpPr/>
+          <p:nvPr/>
+        </p:nvSpPr>
+        <p:spPr>
+          <a:xfrm>
+            <a:off x="365760" y="3127248"/>
+            <a:ext cx="8412480" cy="621792"/>
+          </a:xfrm>
+          <a:prstGeom prst="rect">
+            <a:avLst/>
+          </a:prstGeom>
+          <a:solidFill>
+            <a:srgbClr val="FFFFFF">
+              <a:alpha val="8000"/>
+            </a:srgbClr>
+          </a:solidFill>
+          <a:ln w="12700">
+            <a:solidFill>
+              <a:srgbClr val="FFFFFF">
+                <a:alpha val="20000"/>
+              </a:srgbClr>
+            </a:solidFill>
+            <a:prstDash val="solid"/>
+          </a:ln>
+        </p:spPr>
+        <p:txBody>
+          <a:bodyPr/>
+          <a:lstStyle/>
+          <a:p>
+            <a:endParaRPr lang="es-CO"/>
+          </a:p>
+        </p:txBody>
+      </p:sp>
+      <p:sp>
+        <p:nvSpPr>
+          <p:cNvPr id="10" name="Text 8"/>
+          <p:cNvSpPr/>
+          <p:nvPr/>
+        </p:nvSpPr>
+        <p:spPr>
+          <a:xfrm>
+            <a:off x="502920" y="3154680"/>
+            <a:ext cx="8229600" cy="566928"/>
+          </a:xfrm>
+          <a:prstGeom prst="rect">
+            <a:avLst/>
+          </a:prstGeom>
+          <a:noFill/>
+          <a:ln/>
+        </p:spPr>
+        <p:txBody>
+          <a:bodyPr wrap="square" rtlCol="0" anchor="ctr"/>
+          <a:lstStyle/>
+          <a:p>
+            <a:pPr marL="0" indent="0">
+              <a:lnSpc>
+                <a:spcPct val="130000"/>
+              </a:lnSpc>
+              <a:buNone/>
+            </a:pPr>
+            <a:r>
+              <a:rPr lang="en-US" sz="1200" dirty="0">
+                <a:solidFill>
+                  <a:srgbClr val="DDEEFF"/>
+                </a:solidFill>
+                <a:latin typeface="Calibri" pitchFamily="34" charset="0"/>
+                <a:ea typeface="Calibri" pitchFamily="34" charset="-122"/>
+                <a:cs typeface="Calibri" pitchFamily="34" charset="-120"/>
+              </a:rPr>
+              <a:t>→  ¿Cómo distinguen un análisis correcto de uno que solo parece correcto?</a:t>
+            </a:r>
+            <a:endParaRPr lang="en-US" sz="1200" dirty="0"/>
+          </a:p>
+        </p:txBody>
+      </p:sp>
+      <p:sp>
+        <p:nvSpPr>
+          <p:cNvPr id="11" name="Shape 9"/>
+          <p:cNvSpPr/>
+          <p:nvPr/>
+        </p:nvSpPr>
+        <p:spPr>
+          <a:xfrm>
+            <a:off x="365760" y="3904488"/>
+            <a:ext cx="8412480" cy="621792"/>
+          </a:xfrm>
+          <a:prstGeom prst="rect">
+            <a:avLst/>
+          </a:prstGeom>
+          <a:solidFill>
+            <a:srgbClr val="FFFFFF">
+              <a:alpha val="8000"/>
+            </a:srgbClr>
+          </a:solidFill>
+          <a:ln w="12700">
+            <a:solidFill>
+              <a:srgbClr val="FFFFFF">
+                <a:alpha val="20000"/>
+              </a:srgbClr>
+            </a:solidFill>
+            <a:prstDash val="solid"/>
+          </a:ln>
+        </p:spPr>
+        <p:txBody>
+          <a:bodyPr/>
+          <a:lstStyle/>
+          <a:p>
+            <a:endParaRPr lang="es-CO"/>
+          </a:p>
+        </p:txBody>
+      </p:sp>
+      <p:sp>
+        <p:nvSpPr>
+          <p:cNvPr id="12" name="Text 10"/>
+          <p:cNvSpPr/>
+          <p:nvPr/>
+        </p:nvSpPr>
+        <p:spPr>
+          <a:xfrm>
+            <a:off x="502920" y="3931920"/>
+            <a:ext cx="8229600" cy="566928"/>
+          </a:xfrm>
+          <a:prstGeom prst="rect">
+            <a:avLst/>
+          </a:prstGeom>
+          <a:noFill/>
+          <a:ln/>
+        </p:spPr>
+        <p:txBody>
+          <a:bodyPr wrap="square" rtlCol="0" anchor="ctr"/>
+          <a:lstStyle/>
+          <a:p>
+            <a:pPr marL="0" indent="0">
+              <a:lnSpc>
+                <a:spcPct val="130000"/>
+              </a:lnSpc>
+              <a:buNone/>
+            </a:pPr>
+            <a:r>
+              <a:rPr lang="en-US" sz="1200" dirty="0">
+                <a:solidFill>
+                  <a:srgbClr val="DDEEFF"/>
+                </a:solidFill>
+                <a:latin typeface="Calibri" pitchFamily="34" charset="0"/>
+                <a:ea typeface="Calibri" pitchFamily="34" charset="-122"/>
+                <a:cs typeface="Calibri" pitchFamily="34" charset="-120"/>
+              </a:rPr>
+              <a:t>→  Si alguien actúa sobre un análisis de IA incorrecto, ¿quién responde — y cómo se detecta el error?</a:t>
+            </a:r>
+            <a:endParaRPr lang="en-US" sz="1200" dirty="0"/>
+          </a:p>
+        </p:txBody>
+      </p:sp>
+    </p:spTree>
+  </p:cSld>
+  <p:clrMapOvr>
+    <a:masterClrMapping/>
+  </p:clrMapOvr>
+</p:sld>
+</file>
+
+<file path=ppt/slides/slide11.xml><?xml version="1.0" encoding="utf-8"?>
+<p:sld xmlns:a="http://schemas.openxmlformats.org/drawingml/2006/main" xmlns:r="http://schemas.openxmlformats.org/officeDocument/2006/relationships" xmlns:p="http://schemas.openxmlformats.org/presentationml/2006/main">
   <p:cSld name="Slide 8">
     <p:bg>
       <p:bgPr>
@@ -3393,7 +3894,7 @@
 </p:sld>
 </file>
 
-<file path=ppt/slides/slide11.xml><?xml version="1.0" encoding="utf-8"?>
+<file path=ppt/slides/slide12.xml><?xml version="1.0" encoding="utf-8"?>
 <p:sld xmlns:a="http://schemas.openxmlformats.org/drawingml/2006/main" xmlns:r="http://schemas.openxmlformats.org/officeDocument/2006/relationships" xmlns:p="http://schemas.openxmlformats.org/presentationml/2006/main">
   <p:cSld>
     <p:bg>
@@ -3734,7 +4235,7 @@
 </p:sld>
 </file>
 
-<file path=ppt/slides/slide12.xml><?xml version="1.0" encoding="utf-8"?>
+<file path=ppt/slides/slide13.xml><?xml version="1.0" encoding="utf-8"?>
 <p:sld xmlns:a="http://schemas.openxmlformats.org/drawingml/2006/main" xmlns:r="http://schemas.openxmlformats.org/officeDocument/2006/relationships" xmlns:p="http://schemas.openxmlformats.org/presentationml/2006/main">
   <p:cSld name="Slide 10">
     <p:bg>
@@ -6260,6 +6761,270 @@
 
 <file path=ppt/slides/slide6.xml><?xml version="1.0" encoding="utf-8"?>
 <p:sld xmlns:a="http://schemas.openxmlformats.org/drawingml/2006/main" xmlns:r="http://schemas.openxmlformats.org/officeDocument/2006/relationships" xmlns:p="http://schemas.openxmlformats.org/presentationml/2006/main">
+  <p:cSld>
+    <p:spTree>
+      <p:nvGrpSpPr>
+        <p:cNvPr id="1" name="">
+          <a:extLst>
+            <a:ext uri="{FF2B5EF4-FFF2-40B4-BE49-F238E27FC236}">
+              <a16:creationId xmlns:a16="http://schemas.microsoft.com/office/drawing/2014/main" id="{C1960772-6918-48B7-BDA8-310B93CB8303}"/>
+            </a:ext>
+          </a:extLst>
+        </p:cNvPr>
+        <p:cNvGrpSpPr/>
+        <p:nvPr/>
+      </p:nvGrpSpPr>
+      <p:grpSpPr>
+        <a:xfrm>
+          <a:off x="0" y="0"/>
+          <a:ext cx="0" cy="0"/>
+          <a:chOff x="0" y="0"/>
+          <a:chExt cx="0" cy="0"/>
+        </a:xfrm>
+      </p:grpSpPr>
+      <p:grpSp>
+        <p:nvGrpSpPr>
+          <p:cNvPr id="2" name="Group 2">
+            <a:extLst>
+              <a:ext uri="{FF2B5EF4-FFF2-40B4-BE49-F238E27FC236}">
+                <a16:creationId xmlns:a16="http://schemas.microsoft.com/office/drawing/2014/main" id="{7B3DBBEA-17F0-C3F4-FE99-D43FBACE87DB}"/>
+              </a:ext>
+            </a:extLst>
+          </p:cNvPr>
+          <p:cNvGrpSpPr/>
+          <p:nvPr/>
+        </p:nvGrpSpPr>
+        <p:grpSpPr>
+          <a:xfrm>
+            <a:off x="4346154" y="0"/>
+            <a:ext cx="4797847" cy="5283091"/>
+            <a:chOff x="0" y="0"/>
+            <a:chExt cx="3160185" cy="3479800"/>
+          </a:xfrm>
+          <a:solidFill>
+            <a:srgbClr val="00205B"/>
+          </a:solidFill>
+        </p:grpSpPr>
+        <p:sp>
+          <p:nvSpPr>
+            <p:cNvPr id="3" name="Freeform 3">
+              <a:extLst>
+                <a:ext uri="{FF2B5EF4-FFF2-40B4-BE49-F238E27FC236}">
+                  <a16:creationId xmlns:a16="http://schemas.microsoft.com/office/drawing/2014/main" id="{C3DD889E-6F8A-B5C3-1DF6-2D0F1711B3D1}"/>
+                </a:ext>
+              </a:extLst>
+            </p:cNvPr>
+            <p:cNvSpPr/>
+            <p:nvPr/>
+          </p:nvSpPr>
+          <p:spPr>
+            <a:xfrm>
+              <a:off x="0" y="0"/>
+              <a:ext cx="3160185" cy="3479800"/>
+            </a:xfrm>
+            <a:custGeom>
+              <a:avLst/>
+              <a:gdLst/>
+              <a:ahLst/>
+              <a:cxnLst/>
+              <a:rect l="l" t="t" r="r" b="b"/>
+              <a:pathLst>
+                <a:path w="3160185" h="3479800">
+                  <a:moveTo>
+                    <a:pt x="0" y="0"/>
+                  </a:moveTo>
+                  <a:lnTo>
+                    <a:pt x="3160185" y="0"/>
+                  </a:lnTo>
+                  <a:lnTo>
+                    <a:pt x="3160185" y="3479800"/>
+                  </a:lnTo>
+                  <a:lnTo>
+                    <a:pt x="0" y="3479800"/>
+                  </a:lnTo>
+                  <a:close/>
+                </a:path>
+              </a:pathLst>
+            </a:custGeom>
+            <a:grpFill/>
+          </p:spPr>
+          <p:txBody>
+            <a:bodyPr/>
+            <a:lstStyle/>
+            <a:p>
+              <a:pPr defTabSz="457200">
+                <a:defRPr/>
+              </a:pPr>
+              <a:endParaRPr lang="es-CO" sz="900" dirty="0">
+                <a:solidFill>
+                  <a:prstClr val="black"/>
+                </a:solidFill>
+                <a:latin typeface="Aptos" panose="02110004020202020204"/>
+              </a:endParaRPr>
+            </a:p>
+          </p:txBody>
+        </p:sp>
+      </p:grpSp>
+      <p:sp>
+        <p:nvSpPr>
+          <p:cNvPr id="6" name="TextBox 6">
+            <a:extLst>
+              <a:ext uri="{FF2B5EF4-FFF2-40B4-BE49-F238E27FC236}">
+                <a16:creationId xmlns:a16="http://schemas.microsoft.com/office/drawing/2014/main" id="{1D5CCCF0-6D96-E212-3853-559933AC575E}"/>
+              </a:ext>
+            </a:extLst>
+          </p:cNvPr>
+          <p:cNvSpPr txBox="1"/>
+          <p:nvPr/>
+        </p:nvSpPr>
+        <p:spPr>
+          <a:xfrm>
+            <a:off x="533333" y="339502"/>
+            <a:ext cx="3126494" cy="1918795"/>
+          </a:xfrm>
+          <a:prstGeom prst="rect">
+            <a:avLst/>
+          </a:prstGeom>
+        </p:spPr>
+        <p:txBody>
+          <a:bodyPr lIns="0" tIns="0" rIns="0" bIns="0" rtlCol="0" anchor="t">
+            <a:spAutoFit/>
+          </a:bodyPr>
+          <a:lstStyle/>
+          <a:p>
+            <a:pPr algn="ctr" defTabSz="457200">
+              <a:lnSpc>
+                <a:spcPts val="3795"/>
+              </a:lnSpc>
+              <a:defRPr/>
+            </a:pPr>
+            <a:r>
+              <a:rPr lang="es-MX" sz="3449" dirty="0">
+                <a:solidFill>
+                  <a:srgbClr val="00205B"/>
+                </a:solidFill>
+                <a:latin typeface="+mj-lt"/>
+              </a:rPr>
+              <a:t>Les presento a </a:t>
+            </a:r>
+          </a:p>
+          <a:p>
+            <a:pPr algn="ctr" defTabSz="457200">
+              <a:lnSpc>
+                <a:spcPts val="3795"/>
+              </a:lnSpc>
+              <a:defRPr/>
+            </a:pPr>
+            <a:r>
+              <a:rPr lang="es-MX" sz="3449" dirty="0">
+                <a:solidFill>
+                  <a:srgbClr val="00205B"/>
+                </a:solidFill>
+                <a:latin typeface="+mj-lt"/>
+              </a:rPr>
+              <a:t>Iana</a:t>
+            </a:r>
+          </a:p>
+          <a:p>
+            <a:pPr algn="ctr" defTabSz="457200">
+              <a:lnSpc>
+                <a:spcPts val="3795"/>
+              </a:lnSpc>
+              <a:defRPr/>
+            </a:pPr>
+            <a:r>
+              <a:rPr lang="es-MX" sz="2700" dirty="0">
+                <a:solidFill>
+                  <a:srgbClr val="00205B"/>
+                </a:solidFill>
+                <a:latin typeface="+mj-lt"/>
+              </a:rPr>
+              <a:t>Su monitora para este taller</a:t>
+            </a:r>
+            <a:endParaRPr lang="es-MX" sz="1000" dirty="0">
+              <a:solidFill>
+                <a:srgbClr val="00205B"/>
+              </a:solidFill>
+              <a:latin typeface="+mj-lt"/>
+            </a:endParaRPr>
+          </a:p>
+        </p:txBody>
+      </p:sp>
+      <p:pic>
+        <p:nvPicPr>
+          <p:cNvPr id="9" name="Imagen 8">
+            <a:extLst>
+              <a:ext uri="{FF2B5EF4-FFF2-40B4-BE49-F238E27FC236}">
+                <a16:creationId xmlns:a16="http://schemas.microsoft.com/office/drawing/2014/main" id="{18CFFF09-7C64-C479-499C-7308376886B8}"/>
+              </a:ext>
+            </a:extLst>
+          </p:cNvPr>
+          <p:cNvPicPr>
+            <a:picLocks noChangeAspect="1"/>
+          </p:cNvPicPr>
+          <p:nvPr/>
+        </p:nvPicPr>
+        <p:blipFill>
+          <a:blip r:embed="rId2"/>
+          <a:stretch>
+            <a:fillRect/>
+          </a:stretch>
+        </p:blipFill>
+        <p:spPr>
+          <a:xfrm>
+            <a:off x="4482788" y="735546"/>
+            <a:ext cx="4896275" cy="3425487"/>
+          </a:xfrm>
+          <a:prstGeom prst="rect">
+            <a:avLst/>
+          </a:prstGeom>
+        </p:spPr>
+      </p:pic>
+      <p:pic>
+        <p:nvPicPr>
+          <p:cNvPr id="5" name="Imagen 4">
+            <a:extLst>
+              <a:ext uri="{FF2B5EF4-FFF2-40B4-BE49-F238E27FC236}">
+                <a16:creationId xmlns:a16="http://schemas.microsoft.com/office/drawing/2014/main" id="{4BEB462C-4ED7-EE00-1ABC-E18635883594}"/>
+              </a:ext>
+            </a:extLst>
+          </p:cNvPr>
+          <p:cNvPicPr>
+            <a:picLocks noChangeAspect="1"/>
+          </p:cNvPicPr>
+          <p:nvPr/>
+        </p:nvPicPr>
+        <p:blipFill>
+          <a:blip r:embed="rId3"/>
+          <a:stretch>
+            <a:fillRect/>
+          </a:stretch>
+        </p:blipFill>
+        <p:spPr>
+          <a:xfrm>
+            <a:off x="1033687" y="2226267"/>
+            <a:ext cx="2626140" cy="2577731"/>
+          </a:xfrm>
+          <a:prstGeom prst="rect">
+            <a:avLst/>
+          </a:prstGeom>
+        </p:spPr>
+      </p:pic>
+    </p:spTree>
+    <p:extLst>
+      <p:ext uri="{BB962C8B-B14F-4D97-AF65-F5344CB8AC3E}">
+        <p14:creationId xmlns:p14="http://schemas.microsoft.com/office/powerpoint/2010/main" val="4242831982"/>
+      </p:ext>
+    </p:extLst>
+  </p:cSld>
+  <p:clrMapOvr>
+    <a:masterClrMapping/>
+  </p:clrMapOvr>
+</p:sld>
+</file>
+
+<file path=ppt/slides/slide7.xml><?xml version="1.0" encoding="utf-8"?>
+<p:sld xmlns:a="http://schemas.openxmlformats.org/drawingml/2006/main" xmlns:r="http://schemas.openxmlformats.org/officeDocument/2006/relationships" xmlns:p="http://schemas.openxmlformats.org/presentationml/2006/main">
   <p:cSld name="Slide 4">
     <p:bg>
       <p:bgPr>
@@ -7201,7 +7966,7 @@
 </p:sld>
 </file>
 
-<file path=ppt/slides/slide7.xml><?xml version="1.0" encoding="utf-8"?>
+<file path=ppt/slides/slide8.xml><?xml version="1.0" encoding="utf-8"?>
 <p:sld xmlns:a="http://schemas.openxmlformats.org/drawingml/2006/main" xmlns:r="http://schemas.openxmlformats.org/officeDocument/2006/relationships" xmlns:p="http://schemas.openxmlformats.org/presentationml/2006/main">
   <p:cSld name="Slide 5">
     <p:bg>
@@ -7765,7 +8530,7 @@
 </p:sld>
 </file>
 
-<file path=ppt/slides/slide8.xml><?xml version="1.0" encoding="utf-8"?>
+<file path=ppt/slides/slide9.xml><?xml version="1.0" encoding="utf-8"?>
 <p:sld xmlns:a="http://schemas.openxmlformats.org/drawingml/2006/main" xmlns:r="http://schemas.openxmlformats.org/officeDocument/2006/relationships" xmlns:p="http://schemas.openxmlformats.org/presentationml/2006/main">
   <p:cSld name="Slide 6">
     <p:bg>
@@ -7865,468 +8630,6 @@
               <a:t>Para el Bloque 2: de usar la herramienta a gobernar los datos que le damos.</a:t>
             </a:r>
             <a:endParaRPr lang="en-US" sz="1600" dirty="0"/>
-          </a:p>
-        </p:txBody>
-      </p:sp>
-    </p:spTree>
-  </p:cSld>
-  <p:clrMapOvr>
-    <a:masterClrMapping/>
-  </p:clrMapOvr>
-</p:sld>
-</file>
-
-<file path=ppt/slides/slide9.xml><?xml version="1.0" encoding="utf-8"?>
-<p:sld xmlns:a="http://schemas.openxmlformats.org/drawingml/2006/main" xmlns:r="http://schemas.openxmlformats.org/officeDocument/2006/relationships" xmlns:p="http://schemas.openxmlformats.org/presentationml/2006/main">
-  <p:cSld name="Slide 7">
-    <p:bg>
-      <p:bgPr>
-        <a:solidFill>
-          <a:srgbClr val="1C3557"/>
-        </a:solidFill>
-        <a:effectLst/>
-      </p:bgPr>
-    </p:bg>
-    <p:spTree>
-      <p:nvGrpSpPr>
-        <p:cNvPr id="1" name=""/>
-        <p:cNvGrpSpPr/>
-        <p:nvPr/>
-      </p:nvGrpSpPr>
-      <p:grpSpPr>
-        <a:xfrm>
-          <a:off x="0" y="0"/>
-          <a:ext cx="0" cy="0"/>
-          <a:chOff x="0" y="0"/>
-          <a:chExt cx="0" cy="0"/>
-        </a:xfrm>
-      </p:grpSpPr>
-      <p:sp>
-        <p:nvSpPr>
-          <p:cNvPr id="2" name="Shape 0"/>
-          <p:cNvSpPr/>
-          <p:nvPr/>
-        </p:nvSpPr>
-        <p:spPr>
-          <a:xfrm>
-            <a:off x="0" y="0"/>
-            <a:ext cx="9144000" cy="1417320"/>
-          </a:xfrm>
-          <a:prstGeom prst="rect">
-            <a:avLst/>
-          </a:prstGeom>
-          <a:solidFill>
-            <a:srgbClr val="0E7490">
-              <a:alpha val="20000"/>
-            </a:srgbClr>
-          </a:solidFill>
-          <a:ln w="12700">
-            <a:solidFill>
-              <a:srgbClr val="0E7490">
-                <a:alpha val="0"/>
-              </a:srgbClr>
-            </a:solidFill>
-            <a:prstDash val="solid"/>
-          </a:ln>
-        </p:spPr>
-        <p:txBody>
-          <a:bodyPr/>
-          <a:lstStyle/>
-          <a:p>
-            <a:endParaRPr lang="es-CO"/>
-          </a:p>
-        </p:txBody>
-      </p:sp>
-      <p:sp>
-        <p:nvSpPr>
-          <p:cNvPr id="3" name="Text 1"/>
-          <p:cNvSpPr/>
-          <p:nvPr/>
-        </p:nvSpPr>
-        <p:spPr>
-          <a:xfrm>
-            <a:off x="457200" y="201168"/>
-            <a:ext cx="8229600" cy="320040"/>
-          </a:xfrm>
-          <a:prstGeom prst="rect">
-            <a:avLst/>
-          </a:prstGeom>
-          <a:noFill/>
-          <a:ln/>
-        </p:spPr>
-        <p:txBody>
-          <a:bodyPr wrap="square" rtlCol="0" anchor="ctr"/>
-          <a:lstStyle/>
-          <a:p>
-            <a:pPr marL="0" indent="0">
-              <a:buNone/>
-            </a:pPr>
-            <a:r>
-              <a:rPr lang="en-US" sz="900" b="1" kern="0" spc="200" dirty="0">
-                <a:solidFill>
-                  <a:srgbClr val="9DD9E8"/>
-                </a:solidFill>
-                <a:latin typeface="Calibri" pitchFamily="34" charset="0"/>
-                <a:ea typeface="Calibri" pitchFamily="34" charset="-122"/>
-                <a:cs typeface="Calibri" pitchFamily="34" charset="-120"/>
-              </a:rPr>
-              <a:t>BLOQUE 2 — GOBIERNO DE TI</a:t>
-            </a:r>
-            <a:endParaRPr lang="en-US" sz="900" dirty="0"/>
-          </a:p>
-        </p:txBody>
-      </p:sp>
-      <p:sp>
-        <p:nvSpPr>
-          <p:cNvPr id="4" name="Text 2"/>
-          <p:cNvSpPr/>
-          <p:nvPr/>
-        </p:nvSpPr>
-        <p:spPr>
-          <a:xfrm>
-            <a:off x="457200" y="530352"/>
-            <a:ext cx="8229600" cy="841248"/>
-          </a:xfrm>
-          <a:prstGeom prst="rect">
-            <a:avLst/>
-          </a:prstGeom>
-          <a:noFill/>
-          <a:ln/>
-        </p:spPr>
-        <p:txBody>
-          <a:bodyPr wrap="square" rtlCol="0" anchor="ctr"/>
-          <a:lstStyle/>
-          <a:p>
-            <a:pPr marL="0" indent="0">
-              <a:lnSpc>
-                <a:spcPct val="120000"/>
-              </a:lnSpc>
-              <a:buNone/>
-            </a:pPr>
-            <a:r>
-              <a:rPr lang="en-US" sz="2400" b="1" dirty="0">
-                <a:solidFill>
-                  <a:srgbClr val="FFFFFF"/>
-                </a:solidFill>
-                <a:latin typeface="Georgia" pitchFamily="34" charset="0"/>
-                <a:ea typeface="Georgia" pitchFamily="34" charset="-122"/>
-                <a:cs typeface="Georgia" pitchFamily="34" charset="-120"/>
-              </a:rPr>
-              <a:t>¿Qué datos le damos a la IA — y quién decide eso?</a:t>
-            </a:r>
-            <a:endParaRPr lang="en-US" sz="2400" dirty="0"/>
-          </a:p>
-        </p:txBody>
-      </p:sp>
-      <p:sp>
-        <p:nvSpPr>
-          <p:cNvPr id="5" name="Shape 3"/>
-          <p:cNvSpPr/>
-          <p:nvPr/>
-        </p:nvSpPr>
-        <p:spPr>
-          <a:xfrm>
-            <a:off x="365760" y="1572768"/>
-            <a:ext cx="8412480" cy="621792"/>
-          </a:xfrm>
-          <a:prstGeom prst="rect">
-            <a:avLst/>
-          </a:prstGeom>
-          <a:solidFill>
-            <a:srgbClr val="FFFFFF">
-              <a:alpha val="8000"/>
-            </a:srgbClr>
-          </a:solidFill>
-          <a:ln w="12700">
-            <a:solidFill>
-              <a:srgbClr val="FFFFFF">
-                <a:alpha val="20000"/>
-              </a:srgbClr>
-            </a:solidFill>
-            <a:prstDash val="solid"/>
-          </a:ln>
-        </p:spPr>
-        <p:txBody>
-          <a:bodyPr/>
-          <a:lstStyle/>
-          <a:p>
-            <a:endParaRPr lang="es-CO"/>
-          </a:p>
-        </p:txBody>
-      </p:sp>
-      <p:sp>
-        <p:nvSpPr>
-          <p:cNvPr id="6" name="Text 4"/>
-          <p:cNvSpPr/>
-          <p:nvPr/>
-        </p:nvSpPr>
-        <p:spPr>
-          <a:xfrm>
-            <a:off x="502920" y="1600200"/>
-            <a:ext cx="8229600" cy="566928"/>
-          </a:xfrm>
-          <a:prstGeom prst="rect">
-            <a:avLst/>
-          </a:prstGeom>
-          <a:noFill/>
-          <a:ln/>
-        </p:spPr>
-        <p:txBody>
-          <a:bodyPr wrap="square" rtlCol="0" anchor="ctr"/>
-          <a:lstStyle/>
-          <a:p>
-            <a:pPr marL="0" indent="0">
-              <a:lnSpc>
-                <a:spcPct val="130000"/>
-              </a:lnSpc>
-              <a:buNone/>
-            </a:pPr>
-            <a:r>
-              <a:rPr lang="en-US" sz="1200" dirty="0">
-                <a:solidFill>
-                  <a:srgbClr val="DDEEFF"/>
-                </a:solidFill>
-                <a:latin typeface="Calibri" pitchFamily="34" charset="0"/>
-                <a:ea typeface="Calibri" pitchFamily="34" charset="-122"/>
-                <a:cs typeface="Calibri" pitchFamily="34" charset="-120"/>
-              </a:rPr>
-              <a:t>→  Si alguien carga datos de personal o contractuales en Copilot — ¿dónde quedan? ¿Quién lo controla?</a:t>
-            </a:r>
-            <a:endParaRPr lang="en-US" sz="1200" dirty="0"/>
-          </a:p>
-        </p:txBody>
-      </p:sp>
-      <p:sp>
-        <p:nvSpPr>
-          <p:cNvPr id="7" name="Shape 5"/>
-          <p:cNvSpPr/>
-          <p:nvPr/>
-        </p:nvSpPr>
-        <p:spPr>
-          <a:xfrm>
-            <a:off x="365760" y="2350008"/>
-            <a:ext cx="8412480" cy="621792"/>
-          </a:xfrm>
-          <a:prstGeom prst="rect">
-            <a:avLst/>
-          </a:prstGeom>
-          <a:solidFill>
-            <a:srgbClr val="FFFFFF">
-              <a:alpha val="8000"/>
-            </a:srgbClr>
-          </a:solidFill>
-          <a:ln w="12700">
-            <a:solidFill>
-              <a:srgbClr val="FFFFFF">
-                <a:alpha val="20000"/>
-              </a:srgbClr>
-            </a:solidFill>
-            <a:prstDash val="solid"/>
-          </a:ln>
-        </p:spPr>
-        <p:txBody>
-          <a:bodyPr/>
-          <a:lstStyle/>
-          <a:p>
-            <a:endParaRPr lang="es-CO"/>
-          </a:p>
-        </p:txBody>
-      </p:sp>
-      <p:sp>
-        <p:nvSpPr>
-          <p:cNvPr id="8" name="Text 6"/>
-          <p:cNvSpPr/>
-          <p:nvPr/>
-        </p:nvSpPr>
-        <p:spPr>
-          <a:xfrm>
-            <a:off x="502920" y="2377440"/>
-            <a:ext cx="8229600" cy="566928"/>
-          </a:xfrm>
-          <a:prstGeom prst="rect">
-            <a:avLst/>
-          </a:prstGeom>
-          <a:noFill/>
-          <a:ln/>
-        </p:spPr>
-        <p:txBody>
-          <a:bodyPr wrap="square" rtlCol="0" anchor="ctr"/>
-          <a:lstStyle/>
-          <a:p>
-            <a:pPr marL="0" indent="0">
-              <a:lnSpc>
-                <a:spcPct val="130000"/>
-              </a:lnSpc>
-              <a:buNone/>
-            </a:pPr>
-            <a:r>
-              <a:rPr lang="en-US" sz="1200" dirty="0">
-                <a:solidFill>
-                  <a:srgbClr val="DDEEFF"/>
-                </a:solidFill>
-                <a:latin typeface="Calibri" pitchFamily="34" charset="0"/>
-                <a:ea typeface="Calibri" pitchFamily="34" charset="-122"/>
-                <a:cs typeface="Calibri" pitchFamily="34" charset="-120"/>
-              </a:rPr>
-              <a:t>→  ¿Existe una clasificación de qué información puede usarse con IA externa? ¿Quién debería definirla?</a:t>
-            </a:r>
-            <a:endParaRPr lang="en-US" sz="1200" dirty="0"/>
-          </a:p>
-        </p:txBody>
-      </p:sp>
-      <p:sp>
-        <p:nvSpPr>
-          <p:cNvPr id="9" name="Shape 7"/>
-          <p:cNvSpPr/>
-          <p:nvPr/>
-        </p:nvSpPr>
-        <p:spPr>
-          <a:xfrm>
-            <a:off x="365760" y="3127248"/>
-            <a:ext cx="8412480" cy="621792"/>
-          </a:xfrm>
-          <a:prstGeom prst="rect">
-            <a:avLst/>
-          </a:prstGeom>
-          <a:solidFill>
-            <a:srgbClr val="FFFFFF">
-              <a:alpha val="8000"/>
-            </a:srgbClr>
-          </a:solidFill>
-          <a:ln w="12700">
-            <a:solidFill>
-              <a:srgbClr val="FFFFFF">
-                <a:alpha val="20000"/>
-              </a:srgbClr>
-            </a:solidFill>
-            <a:prstDash val="solid"/>
-          </a:ln>
-        </p:spPr>
-        <p:txBody>
-          <a:bodyPr/>
-          <a:lstStyle/>
-          <a:p>
-            <a:endParaRPr lang="es-CO"/>
-          </a:p>
-        </p:txBody>
-      </p:sp>
-      <p:sp>
-        <p:nvSpPr>
-          <p:cNvPr id="10" name="Text 8"/>
-          <p:cNvSpPr/>
-          <p:nvPr/>
-        </p:nvSpPr>
-        <p:spPr>
-          <a:xfrm>
-            <a:off x="502920" y="3154680"/>
-            <a:ext cx="8229600" cy="566928"/>
-          </a:xfrm>
-          <a:prstGeom prst="rect">
-            <a:avLst/>
-          </a:prstGeom>
-          <a:noFill/>
-          <a:ln/>
-        </p:spPr>
-        <p:txBody>
-          <a:bodyPr wrap="square" rtlCol="0" anchor="ctr"/>
-          <a:lstStyle/>
-          <a:p>
-            <a:pPr marL="0" indent="0">
-              <a:lnSpc>
-                <a:spcPct val="130000"/>
-              </a:lnSpc>
-              <a:buNone/>
-            </a:pPr>
-            <a:r>
-              <a:rPr lang="en-US" sz="1200" dirty="0">
-                <a:solidFill>
-                  <a:srgbClr val="DDEEFF"/>
-                </a:solidFill>
-                <a:latin typeface="Calibri" pitchFamily="34" charset="0"/>
-                <a:ea typeface="Calibri" pitchFamily="34" charset="-122"/>
-                <a:cs typeface="Calibri" pitchFamily="34" charset="-120"/>
-              </a:rPr>
-              <a:t>→  ¿Cómo distinguen un análisis correcto de uno que solo parece correcto?</a:t>
-            </a:r>
-            <a:endParaRPr lang="en-US" sz="1200" dirty="0"/>
-          </a:p>
-        </p:txBody>
-      </p:sp>
-      <p:sp>
-        <p:nvSpPr>
-          <p:cNvPr id="11" name="Shape 9"/>
-          <p:cNvSpPr/>
-          <p:nvPr/>
-        </p:nvSpPr>
-        <p:spPr>
-          <a:xfrm>
-            <a:off x="365760" y="3904488"/>
-            <a:ext cx="8412480" cy="621792"/>
-          </a:xfrm>
-          <a:prstGeom prst="rect">
-            <a:avLst/>
-          </a:prstGeom>
-          <a:solidFill>
-            <a:srgbClr val="FFFFFF">
-              <a:alpha val="8000"/>
-            </a:srgbClr>
-          </a:solidFill>
-          <a:ln w="12700">
-            <a:solidFill>
-              <a:srgbClr val="FFFFFF">
-                <a:alpha val="20000"/>
-              </a:srgbClr>
-            </a:solidFill>
-            <a:prstDash val="solid"/>
-          </a:ln>
-        </p:spPr>
-        <p:txBody>
-          <a:bodyPr/>
-          <a:lstStyle/>
-          <a:p>
-            <a:endParaRPr lang="es-CO"/>
-          </a:p>
-        </p:txBody>
-      </p:sp>
-      <p:sp>
-        <p:nvSpPr>
-          <p:cNvPr id="12" name="Text 10"/>
-          <p:cNvSpPr/>
-          <p:nvPr/>
-        </p:nvSpPr>
-        <p:spPr>
-          <a:xfrm>
-            <a:off x="502920" y="3931920"/>
-            <a:ext cx="8229600" cy="566928"/>
-          </a:xfrm>
-          <a:prstGeom prst="rect">
-            <a:avLst/>
-          </a:prstGeom>
-          <a:noFill/>
-          <a:ln/>
-        </p:spPr>
-        <p:txBody>
-          <a:bodyPr wrap="square" rtlCol="0" anchor="ctr"/>
-          <a:lstStyle/>
-          <a:p>
-            <a:pPr marL="0" indent="0">
-              <a:lnSpc>
-                <a:spcPct val="130000"/>
-              </a:lnSpc>
-              <a:buNone/>
-            </a:pPr>
-            <a:r>
-              <a:rPr lang="en-US" sz="1200" dirty="0">
-                <a:solidFill>
-                  <a:srgbClr val="DDEEFF"/>
-                </a:solidFill>
-                <a:latin typeface="Calibri" pitchFamily="34" charset="0"/>
-                <a:ea typeface="Calibri" pitchFamily="34" charset="-122"/>
-                <a:cs typeface="Calibri" pitchFamily="34" charset="-120"/>
-              </a:rPr>
-              <a:t>→  Si alguien actúa sobre un análisis de IA incorrecto, ¿quién responde — y cómo se detecta el error?</a:t>
-            </a:r>
-            <a:endParaRPr lang="en-US" sz="1200" dirty="0"/>
           </a:p>
         </p:txBody>
       </p:sp>
